--- a/data/employees/EMP039/AST-EMP039-01.pptx
+++ b/data/employees/EMP039/AST-EMP039-01.pptx
@@ -9,6 +9,7 @@
     <p:sldId id="257" r:id="rId8"/>
     <p:sldId id="258" r:id="rId9"/>
     <p:sldId id="259" r:id="rId10"/>
+    <p:sldId id="260" r:id="rId11"/>
   </p:sldIdLst>
   <p:sldSz cx="9144000" cy="6858000" type="screen4x3"/>
   <p:notesSz cx="6858000" cy="9144000"/>
@@ -3098,42 +3099,55 @@
             <a:spLocks noGrp="1"/>
           </p:cNvSpPr>
           <p:nvPr>
-            <p:ph type="ctrTitle"/>
-          </p:nvPr>
-        </p:nvSpPr>
-        <p:spPr/>
-        <p:txBody>
-          <a:bodyPr/>
-          <a:lstStyle/>
-          <a:p>
-            <a:r>
-              <a:t>Project update deck - EMP039</a:t>
-            </a:r>
-          </a:p>
-        </p:txBody>
-      </p:sp>
-      <p:sp>
-        <p:nvSpPr>
-          <p:cNvPr id="3" name="Subtitle 2"/>
-          <p:cNvSpPr>
-            <a:spLocks noGrp="1"/>
-          </p:cNvSpPr>
-          <p:nvPr>
-            <p:ph type="subTitle" idx="1"/>
-          </p:nvPr>
-        </p:nvSpPr>
-        <p:spPr/>
-        <p:txBody>
-          <a:bodyPr/>
-          <a:lstStyle/>
-          <a:p>
-            <a:r>
-              <a:t>Drew Kim | Director | R&amp;D</a:t>
-            </a:r>
-          </a:p>
-          <a:p>
-            <a:r>
-              <a:t>Prepared: 2025-02-10</a:t>
+            <p:ph type="title"/>
+          </p:nvPr>
+        </p:nvSpPr>
+        <p:spPr/>
+        <p:txBody>
+          <a:bodyPr/>
+          <a:lstStyle/>
+          <a:p>
+            <a:r>
+              <a:t>Ast Emp039 01 - EMP039</a:t>
+            </a:r>
+          </a:p>
+        </p:txBody>
+      </p:sp>
+      <p:sp>
+        <p:nvSpPr>
+          <p:cNvPr id="3" name="Content Placeholder 2"/>
+          <p:cNvSpPr>
+            <a:spLocks noGrp="1"/>
+          </p:cNvSpPr>
+          <p:nvPr>
+            <p:ph idx="1"/>
+          </p:nvPr>
+        </p:nvSpPr>
+        <p:spPr/>
+        <p:txBody>
+          <a:bodyPr/>
+          <a:lstStyle/>
+          <a:p>
+            <a:r>
+              <a:t>Slide 1: Executive Summary</a:t>
+            </a:r>
+          </a:p>
+          <a:p>
+            <a:pPr lvl="1"/>
+            <a:r>
+              <a:t>Section 1: Automation backlog refinement. EMP039 contributes to ast emp039 01 through recurring collaboration, clear ownership boundaries, and measurable outcomes. The team captures decisions, open issues, and handoffs so that knowledge remains discoverable for future programs.</a:t>
+            </a:r>
+          </a:p>
+          <a:p>
+            <a:pPr lvl="1"/>
+            <a:r>
+              <a:t>Section 2: Knowledge transfer and onboarding. EMP039 contributes to ast emp039 01 through recurring collaboration, clear ownership boundaries, and measurable outcomes. The team captures decisions, open issues, and handoffs so that knowledge remains discoverable for future programs.</a:t>
+            </a:r>
+          </a:p>
+          <a:p>
+            <a:pPr lvl="1"/>
+            <a:r>
+              <a:t>Section 3: Fabric semantic model planning. EMP039 contributes to ast emp039 01 through recurring collaboration, clear ownership boundaries, and measurable outcomes. The team captures decisions, open issues, and handoffs so that knowledge remains discoverable for future programs.</a:t>
             </a:r>
           </a:p>
         </p:txBody>
@@ -3172,7 +3186,7 @@
           <a:lstStyle/>
           <a:p>
             <a:r>
-              <a:t>Research Portfolio Status</a:t>
+              <a:t>Ast Emp039 01 - EMP039</a:t>
             </a:r>
           </a:p>
         </p:txBody>
@@ -3193,17 +3207,25 @@
           <a:lstStyle/>
           <a:p>
             <a:r>
-              <a:t>Overview of Research Portfolio Status for R&amp;D department.</a:t>
-            </a:r>
-          </a:p>
-          <a:p>
-            <a:r>
-              <a:t>Responsible: Drew Kim (Director)</a:t>
-            </a:r>
-          </a:p>
-          <a:p>
-            <a:r>
-              <a:t>Location: Fremont | Skills: Python, SQL, Fabric, Ontology</a:t>
+              <a:t>Slide 2: Executive Summary</a:t>
+            </a:r>
+          </a:p>
+          <a:p>
+            <a:pPr lvl="1"/>
+            <a:r>
+              <a:t>Section 1: Department KPI performance. EMP039 contributes to ast emp039 01 through recurring collaboration, clear ownership boundaries, and measurable outcomes. The team captures decisions, open issues, and handoffs so that knowledge remains discoverable for future programs.</a:t>
+            </a:r>
+          </a:p>
+          <a:p>
+            <a:pPr lvl="1"/>
+            <a:r>
+              <a:t>Section 2: Quarterly delivery milestones. EMP039 contributes to ast emp039 01 through recurring collaboration, clear ownership boundaries, and measurable outcomes. The team captures decisions, open issues, and handoffs so that knowledge remains discoverable for future programs.</a:t>
+            </a:r>
+          </a:p>
+          <a:p>
+            <a:pPr lvl="1"/>
+            <a:r>
+              <a:t>Section 3: Customer escalation analysis. EMP039 contributes to ast emp039 01 through recurring collaboration, clear ownership boundaries, and measurable outcomes. The team captures decisions, open issues, and handoffs so that knowledge remains discoverable for future programs.</a:t>
             </a:r>
           </a:p>
         </p:txBody>
@@ -3242,7 +3264,7 @@
           <a:lstStyle/>
           <a:p>
             <a:r>
-              <a:t>IP Filing Pipeline</a:t>
+              <a:t>Ast Emp039 01 - EMP039</a:t>
             </a:r>
           </a:p>
         </p:txBody>
@@ -3263,17 +3285,25 @@
           <a:lstStyle/>
           <a:p>
             <a:r>
-              <a:t>Overview of IP Filing Pipeline for R&amp;D department.</a:t>
-            </a:r>
-          </a:p>
-          <a:p>
-            <a:r>
-              <a:t>Responsible: Drew Kim (Director)</a:t>
-            </a:r>
-          </a:p>
-          <a:p>
-            <a:r>
-              <a:t>Location: Fremont | Skills: Python, SQL, Fabric, Ontology</a:t>
+              <a:t>Slide 3: Executive Summary</a:t>
+            </a:r>
+          </a:p>
+          <a:p>
+            <a:pPr lvl="1"/>
+            <a:r>
+              <a:t>Section 1: Knowledge transfer and onboarding. EMP039 contributes to ast emp039 01 through recurring collaboration, clear ownership boundaries, and measurable outcomes. The team captures decisions, open issues, and handoffs so that knowledge remains discoverable for future programs.</a:t>
+            </a:r>
+          </a:p>
+          <a:p>
+            <a:pPr lvl="1"/>
+            <a:r>
+              <a:t>Section 2: Data quality remediation. EMP039 contributes to ast emp039 01 through recurring collaboration, clear ownership boundaries, and measurable outcomes. The team captures decisions, open issues, and handoffs so that knowledge remains discoverable for future programs.</a:t>
+            </a:r>
+          </a:p>
+          <a:p>
+            <a:pPr lvl="1"/>
+            <a:r>
+              <a:t>Section 3: Fabric semantic model planning. EMP039 contributes to ast emp039 01 through recurring collaboration, clear ownership boundaries, and measurable outcomes. The team captures decisions, open issues, and handoffs so that knowledge remains discoverable for future programs.</a:t>
             </a:r>
           </a:p>
         </p:txBody>
@@ -3312,7 +3342,7 @@
           <a:lstStyle/>
           <a:p>
             <a:r>
-              <a:t>Technology Readiness Levels</a:t>
+              <a:t>Ast Emp039 01 - EMP039</a:t>
             </a:r>
           </a:p>
         </p:txBody>
@@ -3333,17 +3363,103 @@
           <a:lstStyle/>
           <a:p>
             <a:r>
-              <a:t>Overview of Technology Readiness Levels for R&amp;D department.</a:t>
-            </a:r>
-          </a:p>
-          <a:p>
-            <a:r>
-              <a:t>Responsible: Drew Kim (Director)</a:t>
-            </a:r>
-          </a:p>
-          <a:p>
-            <a:r>
-              <a:t>Location: Fremont | Skills: Python, SQL, Fabric, Ontology</a:t>
+              <a:t>Slide 4: Executive Summary</a:t>
+            </a:r>
+          </a:p>
+          <a:p>
+            <a:pPr lvl="1"/>
+            <a:r>
+              <a:t>Section 1: Fabric semantic model planning. EMP039 contributes to ast emp039 01 through recurring collaboration, clear ownership boundaries, and measurable outcomes. The team captures decisions, open issues, and handoffs so that knowledge remains discoverable for future programs.</a:t>
+            </a:r>
+          </a:p>
+          <a:p>
+            <a:pPr lvl="1"/>
+            <a:r>
+              <a:t>Section 2: Department KPI performance. EMP039 contributes to ast emp039 01 through recurring collaboration, clear ownership boundaries, and measurable outcomes. The team captures decisions, open issues, and handoffs so that knowledge remains discoverable for future programs.</a:t>
+            </a:r>
+          </a:p>
+          <a:p>
+            <a:pPr lvl="1"/>
+            <a:r>
+              <a:t>Section 3: Customer escalation analysis. EMP039 contributes to ast emp039 01 through recurring collaboration, clear ownership boundaries, and measurable outcomes. The team captures decisions, open issues, and handoffs so that knowledge remains discoverable for future programs.</a:t>
+            </a:r>
+          </a:p>
+        </p:txBody>
+      </p:sp>
+    </p:spTree>
+  </p:cSld>
+  <p:clrMapOvr>
+    <a:masterClrMapping/>
+  </p:clrMapOvr>
+</p:sld>
+</file>
+
+<file path=ppt/slides/slide5.xml><?xml version="1.0" encoding="utf-8"?>
+<p:sld xmlns:a="http://schemas.openxmlformats.org/drawingml/2006/main" xmlns:p="http://schemas.openxmlformats.org/presentationml/2006/main" xmlns:r="http://schemas.openxmlformats.org/officeDocument/2006/relationships">
+  <p:cSld>
+    <p:spTree>
+      <p:nvGrpSpPr>
+        <p:cNvPr id="1" name=""/>
+        <p:cNvGrpSpPr/>
+        <p:nvPr/>
+      </p:nvGrpSpPr>
+      <p:grpSpPr/>
+      <p:sp>
+        <p:nvSpPr>
+          <p:cNvPr id="2" name="Title 1"/>
+          <p:cNvSpPr>
+            <a:spLocks noGrp="1"/>
+          </p:cNvSpPr>
+          <p:nvPr>
+            <p:ph type="title"/>
+          </p:nvPr>
+        </p:nvSpPr>
+        <p:spPr/>
+        <p:txBody>
+          <a:bodyPr/>
+          <a:lstStyle/>
+          <a:p>
+            <a:r>
+              <a:t>Ast Emp039 01 - EMP039</a:t>
+            </a:r>
+          </a:p>
+        </p:txBody>
+      </p:sp>
+      <p:sp>
+        <p:nvSpPr>
+          <p:cNvPr id="3" name="Content Placeholder 2"/>
+          <p:cNvSpPr>
+            <a:spLocks noGrp="1"/>
+          </p:cNvSpPr>
+          <p:nvPr>
+            <p:ph idx="1"/>
+          </p:nvPr>
+        </p:nvSpPr>
+        <p:spPr/>
+        <p:txBody>
+          <a:bodyPr/>
+          <a:lstStyle/>
+          <a:p>
+            <a:r>
+              <a:t>Slide 5: Executive Summary</a:t>
+            </a:r>
+          </a:p>
+          <a:p>
+            <a:pPr lvl="1"/>
+            <a:r>
+              <a:t>Section 1: Customer escalation analysis. EMP039 contributes to ast emp039 01 through recurring collaboration, clear ownership boundaries, and measurable outcomes. The team captures decisions, open issues, and handoffs so that knowledge remains discoverable for future programs.</a:t>
+            </a:r>
+          </a:p>
+          <a:p>
+            <a:pPr lvl="1"/>
+            <a:r>
+              <a:t>Section 2: Operational risk review. EMP039 contributes to ast emp039 01 through recurring collaboration, clear ownership boundaries, and measurable outcomes. The team captures decisions, open issues, and handoffs so that knowledge remains discoverable for future programs.</a:t>
+            </a:r>
+          </a:p>
+          <a:p>
+            <a:pPr lvl="1"/>
+            <a:r>
+              <a:t>Section 3: Quarterly delivery milestones. EMP039 contributes to ast emp039 01 through recurring collaboration, clear ownership boundaries, and measurable outcomes. The team captures decisions, open issues, and handoffs so that knowledge remains discoverable for future programs.</a:t>
             </a:r>
           </a:p>
         </p:txBody>
